--- a/curso_es/pptx/S46.pptx
+++ b/curso_es/pptx/S46.pptx
@@ -4726,7 +4726,7 @@
                 </a:solidFill>
                 <a:latin typeface="Nunito Sans"/>
               </a:rPr>
-              <a:t>Chen quiere vender su bici usada. Antes de poner precio, mira cuánto piden por bicis iguales en internet: unos 150 €. Pone 140 €.</a:t>
+              <a:t>Un chico quiere vender su bici usada. Antes de poner precio, mira cuánto piden por bicis iguales en internet: unos 150 €. Pone 140 €.</a:t>
             </a:r>
           </a:p>
         </p:txBody>
